--- a/curso/pptx/S16.pptx
+++ b/curso/pptx/S16.pptx
@@ -3892,8 +3892,8 @@
         </p:nvSpPr>
         <p:spPr>
           <a:xfrm>
-            <a:off x="640000" y="420000"/>
-            <a:ext cx="10912000" cy="420000"/>
+            <a:off x="10652000" y="380000"/>
+            <a:ext cx="900000" cy="800000"/>
           </a:xfrm>
           <a:prstGeom prst="rect">
             <a:avLst/>
@@ -3908,17 +3908,17 @@
           <a:p>
             <a:pPr>
               <a:spcAft>
-                <a:spcPts val="810"/>
-              </a:spcAft>
-            </a:pPr>
-            <a:r>
-              <a:rPr sz="1800" b="1">
+                <a:spcPts val="1980"/>
+              </a:spcAft>
+            </a:pPr>
+            <a:r>
+              <a:rPr sz="4400" b="0">
                 <a:solidFill>
                   <a:srgbClr val="1F2A44"/>
                 </a:solidFill>
                 <a:latin typeface="Nunito Sans"/>
               </a:rPr>
-              <a:t>🦉 Aula de Filosofía</a:t>
+              <a:t>🙃</a:t>
             </a:r>
           </a:p>
         </p:txBody>

--- a/curso/pptx/S16.pptx
+++ b/curso/pptx/S16.pptx
@@ -5300,7 +5300,7 @@
                 </a:solidFill>
                 <a:latin typeface="Nunito Sans"/>
               </a:rPr>
-              <a:t>El miedo o la pena </a:t>
+              <a:t>El miedo, la pena o la culpa </a:t>
             </a:r>
             <a:r>
               <a:rPr sz="2600" b="1">
@@ -7603,7 +7603,7 @@
                 </a:solidFill>
                 <a:latin typeface="Fredoka"/>
               </a:rPr>
-              <a:t>Miedo y pena en lugar de razones</a:t>
+              <a:t>Miedo, pena y culpa en lugar de razones</a:t>
             </a:r>
           </a:p>
         </p:txBody>
@@ -7668,7 +7668,7 @@
                 </a:solidFill>
                 <a:latin typeface="Nunito Sans"/>
               </a:rPr>
-              <a:t>BLOQUE 1 · MIEDO Y PENA EN LUGAR DE RAZONES</a:t>
+              <a:t>BLOQUE 1 · MIEDO, PENA Y CULPA EN LUGAR DE RAZONES</a:t>
             </a:r>
           </a:p>
         </p:txBody>
@@ -7979,7 +7979,7 @@
                 </a:solidFill>
                 <a:latin typeface="Nunito Sans"/>
               </a:rPr>
-              <a:t>BLOQUE 1 · MIEDO Y PENA EN LUGAR DE RAZONES</a:t>
+              <a:t>BLOQUE 1 · MIEDO, PENA Y CULPA EN LUGAR DE RAZONES</a:t>
             </a:r>
           </a:p>
         </p:txBody>
@@ -8281,7 +8281,7 @@
                 </a:solidFill>
                 <a:latin typeface="Nunito Sans"/>
               </a:rPr>
-              <a:t>BLOQUE 1 · MIEDO Y PENA EN LUGAR DE RAZONES</a:t>
+              <a:t>BLOQUE 1 · MIEDO, PENA Y CULPA EN LUGAR DE RAZONES</a:t>
             </a:r>
           </a:p>
         </p:txBody>
@@ -8335,7 +8335,7 @@
         </p:nvGraphicFramePr>
         <p:xfrm>
           <a:off x="640000" y="1700000"/>
-          <a:ext cx="10912000" cy="1800000"/>
+          <a:ext cx="10912000" cy="2400000"/>
         </p:xfrm>
         <a:graphic>
           <a:graphicData uri="http://schemas.openxmlformats.org/drawingml/2006/table">
@@ -8548,6 +8548,74 @@
                   <a:tcPr>
                     <a:solidFill>
                       <a:srgbClr val="EAF0F7"/>
+                    </a:solidFill>
+                  </a:tcPr>
+                </a:tc>
+              </a:tr>
+              <a:tr h="600000">
+                <a:tc>
+                  <a:txBody>
+                    <a:bodyPr/>
+                    <a:lstStyle/>
+                    <a:p>
+                      <a:r>
+                        <a:rPr sz="2000" b="0">
+                          <a:solidFill>
+                            <a:srgbClr val="1F2A44"/>
+                          </a:solidFill>
+                          <a:latin typeface="Nunito Sans"/>
+                        </a:rPr>
+                        <a:t>Culpa</a:t>
+                      </a:r>
+                    </a:p>
+                  </a:txBody>
+                  <a:tcPr>
+                    <a:solidFill>
+                      <a:srgbClr val="FFFFFF"/>
+                    </a:solidFill>
+                  </a:tcPr>
+                </a:tc>
+                <a:tc>
+                  <a:txBody>
+                    <a:bodyPr/>
+                    <a:lstStyle/>
+                    <a:p>
+                      <a:r>
+                        <a:rPr sz="2000" b="0">
+                          <a:solidFill>
+                            <a:srgbClr val="1F2A44"/>
+                          </a:solidFill>
+                          <a:latin typeface="Nunito Sans"/>
+                        </a:rPr>
+                        <a:t>«Si de verdad te importara tu familia…»</a:t>
+                      </a:r>
+                    </a:p>
+                  </a:txBody>
+                  <a:tcPr>
+                    <a:solidFill>
+                      <a:srgbClr val="FFFFFF"/>
+                    </a:solidFill>
+                  </a:tcPr>
+                </a:tc>
+                <a:tc>
+                  <a:txBody>
+                    <a:bodyPr/>
+                    <a:lstStyle/>
+                    <a:p>
+                      <a:r>
+                        <a:rPr sz="2000" b="0">
+                          <a:solidFill>
+                            <a:srgbClr val="1F2A44"/>
+                          </a:solidFill>
+                          <a:latin typeface="Nunito Sans"/>
+                        </a:rPr>
+                        <a:t>«Compártelo o eres mala persona»</a:t>
+                      </a:r>
+                    </a:p>
+                  </a:txBody>
+                  <a:tcPr>
+                    <a:solidFill>
+                      <a:srgbClr val="FFFFFF"/>
                     </a:solidFill>
                   </a:tcPr>
                 </a:tc>

--- a/curso/pptx/S16.pptx
+++ b/curso/pptx/S16.pptx
@@ -473,426 +473,6 @@
     </a:lvl9pPr>
   </p:notesStyle>
 </p:notesMaster>
-</file>
-
-<file path=ppt/notesSlides/notesSlide1.xml><?xml version="1.0" encoding="utf-8"?>
-<p:notes xmlns:a="http://schemas.openxmlformats.org/drawingml/2006/main" xmlns:p="http://schemas.openxmlformats.org/presentationml/2006/main" xmlns:r="http://schemas.openxmlformats.org/officeDocument/2006/relationships">
-  <p:cSld>
-    <p:spTree>
-      <p:nvGrpSpPr>
-        <p:cNvPr id="1" name=""/>
-        <p:cNvGrpSpPr/>
-        <p:nvPr/>
-      </p:nvGrpSpPr>
-      <p:grpSpPr>
-        <a:xfrm>
-          <a:off x="0" y="0"/>
-          <a:ext cx="0" cy="0"/>
-          <a:chOff x="0" y="0"/>
-          <a:chExt cx="0" cy="0"/>
-        </a:xfrm>
-      </p:grpSpPr>
-      <p:sp>
-        <p:nvSpPr>
-          <p:cNvPr id="2" name="Slide Image Placeholder 1"/>
-          <p:cNvSpPr>
-            <a:spLocks noGrp="1"/>
-          </p:cNvSpPr>
-          <p:nvPr>
-            <p:ph type="sldImg" idx="2"/>
-          </p:nvPr>
-        </p:nvSpPr>
-        <p:spPr/>
-      </p:sp>
-      <p:sp>
-        <p:nvSpPr>
-          <p:cNvPr id="3" name="Notes Placeholder 2"/>
-          <p:cNvSpPr>
-            <a:spLocks noGrp="1"/>
-          </p:cNvSpPr>
-          <p:nvPr>
-            <p:ph type="body" idx="3" sz="quarter"/>
-          </p:nvPr>
-        </p:nvSpPr>
-        <p:spPr/>
-        <p:txBody>
-          <a:bodyPr/>
-          <a:lstStyle/>
-          <a:p>
-            <a:r>
-              <a:t>3 minutos. Sin apuntes. Es para recordar, no cuenta para nota.</a:t>
-            </a:r>
-          </a:p>
-        </p:txBody>
-      </p:sp>
-      <p:sp>
-        <p:nvSpPr>
-          <p:cNvPr id="4" name="Slide Number Placeholder 3"/>
-          <p:cNvSpPr>
-            <a:spLocks noGrp="1"/>
-          </p:cNvSpPr>
-          <p:nvPr>
-            <p:ph type="sldNum" idx="5" sz="quarter"/>
-          </p:nvPr>
-        </p:nvSpPr>
-        <p:spPr/>
-      </p:sp>
-    </p:spTree>
-  </p:cSld>
-  <p:clrMapOvr>
-    <a:masterClrMapping/>
-  </p:clrMapOvr>
-</p:notes>
-</file>
-
-<file path=ppt/notesSlides/notesSlide2.xml><?xml version="1.0" encoding="utf-8"?>
-<p:notes xmlns:a="http://schemas.openxmlformats.org/drawingml/2006/main" xmlns:p="http://schemas.openxmlformats.org/presentationml/2006/main" xmlns:r="http://schemas.openxmlformats.org/officeDocument/2006/relationships">
-  <p:cSld>
-    <p:spTree>
-      <p:nvGrpSpPr>
-        <p:cNvPr id="1" name=""/>
-        <p:cNvGrpSpPr/>
-        <p:nvPr/>
-      </p:nvGrpSpPr>
-      <p:grpSpPr>
-        <a:xfrm>
-          <a:off x="0" y="0"/>
-          <a:ext cx="0" cy="0"/>
-          <a:chOff x="0" y="0"/>
-          <a:chExt cx="0" cy="0"/>
-        </a:xfrm>
-      </p:grpSpPr>
-      <p:sp>
-        <p:nvSpPr>
-          <p:cNvPr id="2" name="Slide Image Placeholder 1"/>
-          <p:cNvSpPr>
-            <a:spLocks noGrp="1"/>
-          </p:cNvSpPr>
-          <p:nvPr>
-            <p:ph type="sldImg" idx="2"/>
-          </p:nvPr>
-        </p:nvSpPr>
-        <p:spPr/>
-      </p:sp>
-      <p:sp>
-        <p:nvSpPr>
-          <p:cNvPr id="3" name="Notes Placeholder 2"/>
-          <p:cNvSpPr>
-            <a:spLocks noGrp="1"/>
-          </p:cNvSpPr>
-          <p:nvPr>
-            <p:ph type="body" idx="3" sz="quarter"/>
-          </p:nvPr>
-        </p:nvSpPr>
-        <p:spPr/>
-        <p:txBody>
-          <a:bodyPr/>
-          <a:lstStyle/>
-          <a:p>
-            <a:r>
-              <a:t>3 minutos. Sin apuntes. Es para recordar, no cuenta para nota.</a:t>
-            </a:r>
-          </a:p>
-        </p:txBody>
-      </p:sp>
-      <p:sp>
-        <p:nvSpPr>
-          <p:cNvPr id="4" name="Slide Number Placeholder 3"/>
-          <p:cNvSpPr>
-            <a:spLocks noGrp="1"/>
-          </p:cNvSpPr>
-          <p:nvPr>
-            <p:ph type="sldNum" idx="5" sz="quarter"/>
-          </p:nvPr>
-        </p:nvSpPr>
-        <p:spPr/>
-      </p:sp>
-    </p:spTree>
-  </p:cSld>
-  <p:clrMapOvr>
-    <a:masterClrMapping/>
-  </p:clrMapOvr>
-</p:notes>
-</file>
-
-<file path=ppt/notesSlides/notesSlide3.xml><?xml version="1.0" encoding="utf-8"?>
-<p:notes xmlns:a="http://schemas.openxmlformats.org/drawingml/2006/main" xmlns:p="http://schemas.openxmlformats.org/presentationml/2006/main" xmlns:r="http://schemas.openxmlformats.org/officeDocument/2006/relationships">
-  <p:cSld>
-    <p:spTree>
-      <p:nvGrpSpPr>
-        <p:cNvPr id="1" name=""/>
-        <p:cNvGrpSpPr/>
-        <p:nvPr/>
-      </p:nvGrpSpPr>
-      <p:grpSpPr>
-        <a:xfrm>
-          <a:off x="0" y="0"/>
-          <a:ext cx="0" cy="0"/>
-          <a:chOff x="0" y="0"/>
-          <a:chExt cx="0" cy="0"/>
-        </a:xfrm>
-      </p:grpSpPr>
-      <p:sp>
-        <p:nvSpPr>
-          <p:cNvPr id="2" name="Slide Image Placeholder 1"/>
-          <p:cNvSpPr>
-            <a:spLocks noGrp="1"/>
-          </p:cNvSpPr>
-          <p:nvPr>
-            <p:ph type="sldImg" idx="2"/>
-          </p:nvPr>
-        </p:nvSpPr>
-        <p:spPr/>
-      </p:sp>
-      <p:sp>
-        <p:nvSpPr>
-          <p:cNvPr id="3" name="Notes Placeholder 2"/>
-          <p:cNvSpPr>
-            <a:spLocks noGrp="1"/>
-          </p:cNvSpPr>
-          <p:nvPr>
-            <p:ph type="body" idx="3" sz="quarter"/>
-          </p:nvPr>
-        </p:nvSpPr>
-        <p:spPr/>
-        <p:txBody>
-          <a:bodyPr/>
-          <a:lstStyle/>
-          <a:p>
-            <a:r>
-              <a:t>Nadie tiene que contestar: solo pensarlo.</a:t>
-            </a:r>
-          </a:p>
-        </p:txBody>
-      </p:sp>
-      <p:sp>
-        <p:nvSpPr>
-          <p:cNvPr id="4" name="Slide Number Placeholder 3"/>
-          <p:cNvSpPr>
-            <a:spLocks noGrp="1"/>
-          </p:cNvSpPr>
-          <p:nvPr>
-            <p:ph type="sldNum" idx="5" sz="quarter"/>
-          </p:nvPr>
-        </p:nvSpPr>
-        <p:spPr/>
-      </p:sp>
-    </p:spTree>
-  </p:cSld>
-  <p:clrMapOvr>
-    <a:masterClrMapping/>
-  </p:clrMapOvr>
-</p:notes>
-</file>
-
-<file path=ppt/notesSlides/notesSlide4.xml><?xml version="1.0" encoding="utf-8"?>
-<p:notes xmlns:a="http://schemas.openxmlformats.org/drawingml/2006/main" xmlns:p="http://schemas.openxmlformats.org/presentationml/2006/main" xmlns:r="http://schemas.openxmlformats.org/officeDocument/2006/relationships">
-  <p:cSld>
-    <p:spTree>
-      <p:nvGrpSpPr>
-        <p:cNvPr id="1" name=""/>
-        <p:cNvGrpSpPr/>
-        <p:nvPr/>
-      </p:nvGrpSpPr>
-      <p:grpSpPr>
-        <a:xfrm>
-          <a:off x="0" y="0"/>
-          <a:ext cx="0" cy="0"/>
-          <a:chOff x="0" y="0"/>
-          <a:chExt cx="0" cy="0"/>
-        </a:xfrm>
-      </p:grpSpPr>
-      <p:sp>
-        <p:nvSpPr>
-          <p:cNvPr id="2" name="Slide Image Placeholder 1"/>
-          <p:cNvSpPr>
-            <a:spLocks noGrp="1"/>
-          </p:cNvSpPr>
-          <p:nvPr>
-            <p:ph type="sldImg" idx="2"/>
-          </p:nvPr>
-        </p:nvSpPr>
-        <p:spPr/>
-      </p:sp>
-      <p:sp>
-        <p:nvSpPr>
-          <p:cNvPr id="3" name="Notes Placeholder 2"/>
-          <p:cNvSpPr>
-            <a:spLocks noGrp="1"/>
-          </p:cNvSpPr>
-          <p:nvPr>
-            <p:ph type="body" idx="3" sz="quarter"/>
-          </p:nvPr>
-        </p:nvSpPr>
-        <p:spPr/>
-        <p:txBody>
-          <a:bodyPr/>
-          <a:lstStyle/>
-          <a:p>
-            <a:r>
-              <a:t>Dejar unos segundos para que piensen la respuesta fácil antes de enseñar los pasos.</a:t>
-            </a:r>
-          </a:p>
-        </p:txBody>
-      </p:sp>
-      <p:sp>
-        <p:nvSpPr>
-          <p:cNvPr id="4" name="Slide Number Placeholder 3"/>
-          <p:cNvSpPr>
-            <a:spLocks noGrp="1"/>
-          </p:cNvSpPr>
-          <p:nvPr>
-            <p:ph type="sldNum" idx="5" sz="quarter"/>
-          </p:nvPr>
-        </p:nvSpPr>
-        <p:spPr/>
-      </p:sp>
-    </p:spTree>
-  </p:cSld>
-  <p:clrMapOvr>
-    <a:masterClrMapping/>
-  </p:clrMapOvr>
-</p:notes>
-</file>
-
-<file path=ppt/notesSlides/notesSlide5.xml><?xml version="1.0" encoding="utf-8"?>
-<p:notes xmlns:a="http://schemas.openxmlformats.org/drawingml/2006/main" xmlns:p="http://schemas.openxmlformats.org/presentationml/2006/main" xmlns:r="http://schemas.openxmlformats.org/officeDocument/2006/relationships">
-  <p:cSld>
-    <p:spTree>
-      <p:nvGrpSpPr>
-        <p:cNvPr id="1" name=""/>
-        <p:cNvGrpSpPr/>
-        <p:nvPr/>
-      </p:nvGrpSpPr>
-      <p:grpSpPr>
-        <a:xfrm>
-          <a:off x="0" y="0"/>
-          <a:ext cx="0" cy="0"/>
-          <a:chOff x="0" y="0"/>
-          <a:chExt cx="0" cy="0"/>
-        </a:xfrm>
-      </p:grpSpPr>
-      <p:sp>
-        <p:nvSpPr>
-          <p:cNvPr id="2" name="Slide Image Placeholder 1"/>
-          <p:cNvSpPr>
-            <a:spLocks noGrp="1"/>
-          </p:cNvSpPr>
-          <p:nvPr>
-            <p:ph type="sldImg" idx="2"/>
-          </p:nvPr>
-        </p:nvSpPr>
-        <p:spPr/>
-      </p:sp>
-      <p:sp>
-        <p:nvSpPr>
-          <p:cNvPr id="3" name="Notes Placeholder 2"/>
-          <p:cNvSpPr>
-            <a:spLocks noGrp="1"/>
-          </p:cNvSpPr>
-          <p:nvPr>
-            <p:ph type="body" idx="3" sz="quarter"/>
-          </p:nvPr>
-        </p:nvSpPr>
-        <p:spPr/>
-        <p:txBody>
-          <a:bodyPr/>
-          <a:lstStyle/>
-          <a:p>
-            <a:r>
-              <a:t>Dejar 2 minutos para que lo escriban. La diapositiva siguiente muestra el resumen.</a:t>
-            </a:r>
-          </a:p>
-        </p:txBody>
-      </p:sp>
-      <p:sp>
-        <p:nvSpPr>
-          <p:cNvPr id="4" name="Slide Number Placeholder 3"/>
-          <p:cNvSpPr>
-            <a:spLocks noGrp="1"/>
-          </p:cNvSpPr>
-          <p:nvPr>
-            <p:ph type="sldNum" idx="5" sz="quarter"/>
-          </p:nvPr>
-        </p:nvSpPr>
-        <p:spPr/>
-      </p:sp>
-    </p:spTree>
-  </p:cSld>
-  <p:clrMapOvr>
-    <a:masterClrMapping/>
-  </p:clrMapOvr>
-</p:notes>
-</file>
-
-<file path=ppt/notesSlides/notesSlide6.xml><?xml version="1.0" encoding="utf-8"?>
-<p:notes xmlns:a="http://schemas.openxmlformats.org/drawingml/2006/main" xmlns:p="http://schemas.openxmlformats.org/presentationml/2006/main" xmlns:r="http://schemas.openxmlformats.org/officeDocument/2006/relationships">
-  <p:cSld>
-    <p:spTree>
-      <p:nvGrpSpPr>
-        <p:cNvPr id="1" name=""/>
-        <p:cNvGrpSpPr/>
-        <p:nvPr/>
-      </p:nvGrpSpPr>
-      <p:grpSpPr>
-        <a:xfrm>
-          <a:off x="0" y="0"/>
-          <a:ext cx="0" cy="0"/>
-          <a:chOff x="0" y="0"/>
-          <a:chExt cx="0" cy="0"/>
-        </a:xfrm>
-      </p:grpSpPr>
-      <p:sp>
-        <p:nvSpPr>
-          <p:cNvPr id="2" name="Slide Image Placeholder 1"/>
-          <p:cNvSpPr>
-            <a:spLocks noGrp="1"/>
-          </p:cNvSpPr>
-          <p:nvPr>
-            <p:ph type="sldImg" idx="2"/>
-          </p:nvPr>
-        </p:nvSpPr>
-        <p:spPr/>
-      </p:sp>
-      <p:sp>
-        <p:nvSpPr>
-          <p:cNvPr id="3" name="Notes Placeholder 2"/>
-          <p:cNvSpPr>
-            <a:spLocks noGrp="1"/>
-          </p:cNvSpPr>
-          <p:nvPr>
-            <p:ph type="body" idx="3" sz="quarter"/>
-          </p:nvPr>
-        </p:nvSpPr>
-        <p:spPr/>
-        <p:txBody>
-          <a:bodyPr/>
-          <a:lstStyle/>
-          <a:p>
-            <a:r>
-              <a:t>Buscar: «cadenas de WhatsApp falsas» · «apelación al miedo falacia»</a:t>
-            </a:r>
-          </a:p>
-        </p:txBody>
-      </p:sp>
-      <p:sp>
-        <p:nvSpPr>
-          <p:cNvPr id="4" name="Slide Number Placeholder 3"/>
-          <p:cNvSpPr>
-            <a:spLocks noGrp="1"/>
-          </p:cNvSpPr>
-          <p:nvPr>
-            <p:ph type="sldNum" idx="5" sz="quarter"/>
-          </p:nvPr>
-        </p:nvSpPr>
-        <p:spPr/>
-      </p:sp>
-    </p:spTree>
-  </p:cSld>
-  <p:clrMapOvr>
-    <a:masterClrMapping/>
-  </p:clrMapOvr>
-</p:notes>
 </file>
 
 <file path=ppt/slideLayouts/slideLayout1.xml><?xml version="1.0" encoding="utf-8"?>

--- a/curso/pptx/S16.pptx
+++ b/curso/pptx/S16.pptx
@@ -4110,7 +4110,7 @@
                 </a:solidFill>
                 <a:latin typeface="Nunito Sans"/>
               </a:rPr>
-              <a:t>Iker, al profesor: «No me pongas el parte por usar el móvil en clase. Mi madre me castigará sin ir al partido del Athletic».</a:t>
+              <a:t>Un chico, al profesor: «No me pongas el parte por usar el móvil en clase. Mi madre me castigará sin ir al partido del Athletic».</a:t>
             </a:r>
           </a:p>
         </p:txBody>
@@ -4183,7 +4183,7 @@
                 </a:solidFill>
                 <a:latin typeface="Nunito Sans"/>
               </a:rPr>
-              <a:t>¿Qué razón da Iker? Que el castigo le dará mucha pena.</a:t>
+              <a:t>¿Qué razón da el chico? Que el castigo le dará mucha pena.</a:t>
             </a:r>
           </a:p>
           <a:p>

--- a/curso/pptx/S16.pptx
+++ b/curso/pptx/S16.pptx
@@ -3537,7 +3537,7 @@
                 </a:solidFill>
                 <a:latin typeface="Nunito Sans"/>
               </a:rPr>
-              <a:t>PENSAMIENTO CRÍTICO · SESIÓN 16 · UNIDAD 3 · FALACIAS I: ATACAR, DESVIAR, EMOCIONAR</a:t>
+              <a:t>PENSAMIENTO CRÍTICO · SESIÓN 16 · UNIDAD 3 · ARGUMENTAR</a:t>
             </a:r>
           </a:p>
         </p:txBody>
@@ -3576,7 +3576,7 @@
                 </a:solidFill>
                 <a:latin typeface="Fredoka"/>
               </a:rPr>
-              <a:t>Apelar a las emociones</a:t>
+              <a:t>Deducción e inducción</a:t>
             </a:r>
           </a:p>
         </p:txBody>
@@ -3615,7 +3615,7 @@
                 </a:solidFill>
                 <a:latin typeface="Nunito Sans"/>
               </a:rPr>
-              <a:t>Las emociones importan y a veces son razones; la falacia es asustar o dar pena en lugar de dar razones.</a:t>
+              <a:t>En una deducción bien hecha, la conclusión es segura si las premisas son verdad; en una inducción, solo es probable.</a:t>
             </a:r>
           </a:p>
         </p:txBody>
@@ -3719,7 +3719,7 @@
                 </a:solidFill>
                 <a:latin typeface="Fredoka"/>
               </a:rPr>
-              <a:t>Caso 1 · La cadena de WhatsApp</a:t>
+              <a:t>Caso 1 · El reconocimiento médico</a:t>
             </a:r>
           </a:p>
         </p:txBody>
@@ -3801,7 +3801,7 @@
                 </a:solidFill>
                 <a:latin typeface="Nunito Sans"/>
               </a:rPr>
-              <a:t>«Si no reenvías este mensaje a diez contactos antes de medianoche, tu cuenta de WhatsApp se borrará.»</a:t>
+              <a:t>«Todos los jugadores del equipo tienen que pasar el reconocimiento médico. Una chica es del equipo. Por tanto, esa chica tiene que pasarlo.»</a:t>
             </a:r>
           </a:p>
         </p:txBody>
@@ -3849,7 +3849,7 @@
                 </a:solidFill>
                 <a:latin typeface="Nunito Sans"/>
               </a:rPr>
-              <a:t>¿Qué me piden? Reenviar el mensaje.</a:t>
+              <a:t>¿La conclusión sale de lo que dicen las premisas? Sí.</a:t>
             </a:r>
           </a:p>
           <a:p>
@@ -3874,7 +3874,7 @@
                 </a:solidFill>
                 <a:latin typeface="Nunito Sans"/>
               </a:rPr>
-              <a:t>¿Qué razón dan? Un miedo: perder la cuenta.</a:t>
+              <a:t>Si las dos premisas son verdad, ¿puede ser falsa la conclusión? No.</a:t>
             </a:r>
           </a:p>
           <a:p>
@@ -3899,23 +3899,16 @@
                 </a:solidFill>
                 <a:latin typeface="Nunito Sans"/>
               </a:rPr>
-              <a:t>¿Qué pruebas hay? Ninguna. WhatsApp no borra cuentas por no reenviar cadenas.</a:t>
-            </a:r>
-          </a:p>
-          <a:p>
-            <a:pPr>
-              <a:spcAft>
-                <a:spcPts val="1080"/>
-              </a:spcAft>
-            </a:pPr>
+              <a:t>Conclusión: es una </a:t>
+            </a:r>
             <a:r>
               <a:rPr sz="2400" b="1">
                 <a:solidFill>
-                  <a:srgbClr val="E8793A"/>
-                </a:solidFill>
-                <a:latin typeface="Nunito Sans"/>
-              </a:rPr>
-              <a:t>4. </a:t>
+                  <a:srgbClr val="1F2A44"/>
+                </a:solidFill>
+                <a:latin typeface="Nunito Sans"/>
+              </a:rPr>
+              <a:t>deducción</a:t>
             </a:r>
             <a:r>
               <a:rPr sz="2400" b="0">
@@ -3924,7 +3917,7 @@
                 </a:solidFill>
                 <a:latin typeface="Nunito Sans"/>
               </a:rPr>
-              <a:t>Conclusión: apelación al miedo. Si quito el miedo, no queda ninguna razón.</a:t>
+              <a:t>. La conclusión es segura.</a:t>
             </a:r>
           </a:p>
         </p:txBody>
@@ -4028,7 +4021,7 @@
                 </a:solidFill>
                 <a:latin typeface="Fredoka"/>
               </a:rPr>
-              <a:t>Caso 2 · El parte</a:t>
+              <a:t>Caso 2 · La pizza fría</a:t>
             </a:r>
           </a:p>
         </p:txBody>
@@ -4110,7 +4103,7 @@
                 </a:solidFill>
                 <a:latin typeface="Nunito Sans"/>
               </a:rPr>
-              <a:t>Un chico, al profesor: «No me pongas el parte por usar el móvil en clase. Mi madre me castigará sin ir al partido del Athletic».</a:t>
+              <a:t>«Todas las veces que he pedido pizza en ese sitio ha llegado fría. Hoy también llegará fría.»</a:t>
             </a:r>
           </a:p>
         </p:txBody>
@@ -4158,7 +4151,7 @@
                 </a:solidFill>
                 <a:latin typeface="Nunito Sans"/>
               </a:rPr>
-              <a:t>¿Qué se discute? Si usar el móvil en clase merece el parte.</a:t>
+              <a:t>¿De dónde sale la conclusión? De casos que ese chico ha vivido.</a:t>
             </a:r>
           </a:p>
           <a:p>
@@ -4183,7 +4176,7 @@
                 </a:solidFill>
                 <a:latin typeface="Nunito Sans"/>
               </a:rPr>
-              <a:t>¿Qué razón da el chico? Que el castigo le dará mucha pena.</a:t>
+              <a:t>¿Puede fallar? Sí: hoy puede venir otro repartidor o haber menos tráfico.</a:t>
             </a:r>
           </a:p>
           <a:p>
@@ -4208,7 +4201,7 @@
                 </a:solidFill>
                 <a:latin typeface="Nunito Sans"/>
               </a:rPr>
-              <a:t>Si quito la pena, ¿qué queda? Nada sobre si usó el móvil.</a:t>
+              <a:t>¿Es fuerte? Depende de cuántas veces ha pedido: dos veces no es lo mismo que veinte.</a:t>
             </a:r>
           </a:p>
           <a:p>
@@ -4233,7 +4226,25 @@
                 </a:solidFill>
                 <a:latin typeface="Nunito Sans"/>
               </a:rPr>
-              <a:t>Conclusión: apelación a la pena. Su tristeza puede ser real, pero no viene a cuento.</a:t>
+              <a:t>Conclusión: es una </a:t>
+            </a:r>
+            <a:r>
+              <a:rPr sz="2400" b="1">
+                <a:solidFill>
+                  <a:srgbClr val="1F2A44"/>
+                </a:solidFill>
+                <a:latin typeface="Nunito Sans"/>
+              </a:rPr>
+              <a:t>inducción</a:t>
+            </a:r>
+            <a:r>
+              <a:rPr sz="2400" b="0">
+                <a:solidFill>
+                  <a:srgbClr val="1F2A44"/>
+                </a:solidFill>
+                <a:latin typeface="Nunito Sans"/>
+              </a:rPr>
+              <a:t>. La conclusión es probable, no segura.</a:t>
             </a:r>
           </a:p>
         </p:txBody>
@@ -4337,7 +4348,7 @@
                 </a:solidFill>
                 <a:latin typeface="Fredoka"/>
               </a:rPr>
-              <a:t>Caso 3 · Un miedo con razones</a:t>
+              <a:t>Caso 3 · Los cisnes</a:t>
             </a:r>
           </a:p>
         </p:txBody>
@@ -4419,7 +4430,7 @@
                 </a:solidFill>
                 <a:latin typeface="Nunito Sans"/>
               </a:rPr>
-              <a:t>Cartel de una escuela de bici: «Lleva casco. En una caída, protege la cabeza. Lo dicen los médicos de urgencias».</a:t>
+              <a:t>Durante siglos, en Europa solo se vieron cisnes blancos. Por eso se decía: «Todos los cisnes son blancos». En 1697, unos exploradores encontraron cisnes negros en Australia.</a:t>
             </a:r>
           </a:p>
         </p:txBody>
@@ -4467,7 +4478,25 @@
                 </a:solidFill>
                 <a:latin typeface="Nunito Sans"/>
               </a:rPr>
-              <a:t>¿Da miedo? Sí: habla de caídas.</a:t>
+              <a:t>Era una </a:t>
+            </a:r>
+            <a:r>
+              <a:rPr sz="2400" b="1">
+                <a:solidFill>
+                  <a:srgbClr val="1F2A44"/>
+                </a:solidFill>
+                <a:latin typeface="Nunito Sans"/>
+              </a:rPr>
+              <a:t>inducción</a:t>
+            </a:r>
+            <a:r>
+              <a:rPr sz="2400" b="0">
+                <a:solidFill>
+                  <a:srgbClr val="1F2A44"/>
+                </a:solidFill>
+                <a:latin typeface="Nunito Sans"/>
+              </a:rPr>
+              <a:t>: muchos casos vistos y una conclusión general.</a:t>
             </a:r>
           </a:p>
           <a:p>
@@ -4492,7 +4521,7 @@
                 </a:solidFill>
                 <a:latin typeface="Nunito Sans"/>
               </a:rPr>
-              <a:t>¿El peligro es real? Sí: en bici hay caídas.</a:t>
+              <a:t>Muchísimos casos no la hacían segura.</a:t>
             </a:r>
           </a:p>
           <a:p>
@@ -4517,7 +4546,7 @@
                 </a:solidFill>
                 <a:latin typeface="Nunito Sans"/>
               </a:rPr>
-              <a:t>¿Hay razones? Sí: explica cómo protege el casco y quién lo dice.</a:t>
+              <a:t>Bastó ver cisnes negros para tumbarla.</a:t>
             </a:r>
           </a:p>
           <a:p>
@@ -4542,7 +4571,7 @@
                 </a:solidFill>
                 <a:latin typeface="Nunito Sans"/>
               </a:rPr>
-              <a:t>Conclusión: no es falacia. Avisar de un peligro real, con razones, es legítimo.</a:t>
+              <a:t>Conclusión: una inducción puede fallar, aunque tenga muchos casos. Lo veremos en la sesión 17.</a:t>
             </a:r>
           </a:p>
         </p:txBody>
@@ -4556,6 +4585,358 @@
 </file>
 
 <file path=ppt/slides/slide13.xml><?xml version="1.0" encoding="utf-8"?>
+<p:sld xmlns:a="http://schemas.openxmlformats.org/drawingml/2006/main" xmlns:p="http://schemas.openxmlformats.org/presentationml/2006/main" xmlns:r="http://schemas.openxmlformats.org/officeDocument/2006/relationships">
+  <p:cSld>
+    <p:bg>
+      <p:bgPr>
+        <a:solidFill>
+          <a:srgbClr val="F6C9A8"/>
+        </a:solidFill>
+        <a:effectLst/>
+      </p:bgPr>
+    </p:bg>
+    <p:spTree>
+      <p:nvGrpSpPr>
+        <p:cNvPr id="1" name=""/>
+        <p:cNvGrpSpPr/>
+        <p:nvPr/>
+      </p:nvGrpSpPr>
+      <p:grpSpPr/>
+      <p:sp>
+        <p:nvSpPr>
+          <p:cNvPr id="2" name="TextBox 1"/>
+          <p:cNvSpPr txBox="1"/>
+          <p:nvPr/>
+        </p:nvSpPr>
+        <p:spPr>
+          <a:xfrm>
+            <a:off x="640000" y="380000"/>
+            <a:ext cx="10912000" cy="420000"/>
+          </a:xfrm>
+          <a:prstGeom prst="rect">
+            <a:avLst/>
+          </a:prstGeom>
+          <a:noFill/>
+        </p:spPr>
+        <p:txBody>
+          <a:bodyPr wrap="square">
+            <a:spAutoFit/>
+          </a:bodyPr>
+          <a:lstStyle/>
+          <a:p>
+            <a:pPr>
+              <a:spcAft>
+                <a:spcPts val="630"/>
+              </a:spcAft>
+            </a:pPr>
+            <a:r>
+              <a:rPr sz="1400" b="1">
+                <a:solidFill>
+                  <a:srgbClr val="1F2A44"/>
+                </a:solidFill>
+                <a:latin typeface="Nunito Sans"/>
+              </a:rPr>
+              <a:t>CASO TRAMPA · BLOQUE 2 · CASOS RESUELTOS</a:t>
+            </a:r>
+          </a:p>
+        </p:txBody>
+      </p:sp>
+      <p:sp>
+        <p:nvSpPr>
+          <p:cNvPr id="3" name="TextBox 2"/>
+          <p:cNvSpPr txBox="1"/>
+          <p:nvPr/>
+        </p:nvSpPr>
+        <p:spPr>
+          <a:xfrm>
+            <a:off x="640000" y="760000"/>
+            <a:ext cx="10912000" cy="800000"/>
+          </a:xfrm>
+          <a:prstGeom prst="rect">
+            <a:avLst/>
+          </a:prstGeom>
+          <a:noFill/>
+        </p:spPr>
+        <p:txBody>
+          <a:bodyPr wrap="square">
+            <a:spAutoFit/>
+          </a:bodyPr>
+          <a:lstStyle/>
+          <a:p>
+            <a:pPr>
+              <a:spcAft>
+                <a:spcPts val="1710"/>
+              </a:spcAft>
+            </a:pPr>
+            <a:r>
+              <a:rPr sz="3800" b="1">
+                <a:solidFill>
+                  <a:srgbClr val="1F2A44"/>
+                </a:solidFill>
+                <a:latin typeface="Fredoka"/>
+              </a:rPr>
+              <a:t>⚠ ¿«Todos» + «por tanto» = segura?</a:t>
+            </a:r>
+          </a:p>
+        </p:txBody>
+      </p:sp>
+      <p:sp>
+        <p:nvSpPr>
+          <p:cNvPr id="4" name="Rectangle 3"/>
+          <p:cNvSpPr/>
+          <p:nvPr/>
+        </p:nvSpPr>
+        <p:spPr>
+          <a:xfrm>
+            <a:off x="640000" y="1600000"/>
+            <a:ext cx="10912000" cy="1100000"/>
+          </a:xfrm>
+          <a:prstGeom prst="rect">
+            <a:avLst/>
+          </a:prstGeom>
+          <a:solidFill>
+            <a:srgbClr val="FBF7EF"/>
+          </a:solidFill>
+          <a:ln>
+            <a:noFill/>
+          </a:ln>
+        </p:spPr>
+        <p:style>
+          <a:lnRef idx="1">
+            <a:schemeClr val="accent1"/>
+          </a:lnRef>
+          <a:fillRef idx="3">
+            <a:schemeClr val="accent1"/>
+          </a:fillRef>
+          <a:effectRef idx="2">
+            <a:schemeClr val="accent1"/>
+          </a:effectRef>
+          <a:fontRef idx="minor">
+            <a:schemeClr val="lt1"/>
+          </a:fontRef>
+        </p:style>
+        <p:txBody>
+          <a:bodyPr rtlCol="0" anchor="ctr"/>
+          <a:lstStyle/>
+          <a:p>
+            <a:pPr algn="ctr"/>
+          </a:p>
+        </p:txBody>
+      </p:sp>
+      <p:sp>
+        <p:nvSpPr>
+          <p:cNvPr id="5" name="TextBox 4"/>
+          <p:cNvSpPr txBox="1"/>
+          <p:nvPr/>
+        </p:nvSpPr>
+        <p:spPr>
+          <a:xfrm>
+            <a:off x="840000" y="1650000"/>
+            <a:ext cx="10512000" cy="1000000"/>
+          </a:xfrm>
+          <a:prstGeom prst="rect">
+            <a:avLst/>
+          </a:prstGeom>
+          <a:noFill/>
+        </p:spPr>
+        <p:txBody>
+          <a:bodyPr wrap="square" anchor="ctr">
+            <a:spAutoFit/>
+          </a:bodyPr>
+          <a:lstStyle/>
+          <a:p>
+            <a:pPr>
+              <a:spcAft>
+                <a:spcPts val="1170"/>
+              </a:spcAft>
+            </a:pPr>
+            <a:r>
+              <a:rPr sz="2600" b="1">
+                <a:solidFill>
+                  <a:srgbClr val="1F2A44"/>
+                </a:solidFill>
+                <a:latin typeface="Nunito Sans"/>
+              </a:rPr>
+              <a:t>«Todos los de 2.º B tienen Inglés. Un chico tiene Inglés. Por tanto, ese chico es de 2.º B.»</a:t>
+            </a:r>
+          </a:p>
+        </p:txBody>
+      </p:sp>
+      <p:sp>
+        <p:nvSpPr>
+          <p:cNvPr id="6" name="TextBox 5"/>
+          <p:cNvSpPr txBox="1"/>
+          <p:nvPr/>
+        </p:nvSpPr>
+        <p:spPr>
+          <a:xfrm>
+            <a:off x="640000" y="2900000"/>
+            <a:ext cx="10912000" cy="3500000"/>
+          </a:xfrm>
+          <a:prstGeom prst="rect">
+            <a:avLst/>
+          </a:prstGeom>
+          <a:noFill/>
+        </p:spPr>
+        <p:txBody>
+          <a:bodyPr wrap="square">
+            <a:spAutoFit/>
+          </a:bodyPr>
+          <a:lstStyle/>
+          <a:p>
+            <a:pPr>
+              <a:spcAft>
+                <a:spcPts val="1080"/>
+              </a:spcAft>
+            </a:pPr>
+            <a:r>
+              <a:rPr sz="2400" b="1">
+                <a:solidFill>
+                  <a:srgbClr val="E8793A"/>
+                </a:solidFill>
+                <a:latin typeface="Nunito Sans"/>
+              </a:rPr>
+              <a:t>1. </a:t>
+            </a:r>
+            <a:r>
+              <a:rPr sz="2400" b="0">
+                <a:solidFill>
+                  <a:srgbClr val="1F2A44"/>
+                </a:solidFill>
+                <a:latin typeface="Nunito Sans"/>
+              </a:rPr>
+              <a:t>Tiene «todos» y «por tanto», como la del reconocimiento médico. ¿La conclusión es segura?</a:t>
+            </a:r>
+          </a:p>
+          <a:p>
+            <a:pPr>
+              <a:spcAft>
+                <a:spcPts val="1080"/>
+              </a:spcAft>
+            </a:pPr>
+            <a:r>
+              <a:rPr sz="2400" b="1">
+                <a:solidFill>
+                  <a:srgbClr val="E8793A"/>
+                </a:solidFill>
+                <a:latin typeface="Nunito Sans"/>
+              </a:rPr>
+              <a:t>2. </a:t>
+            </a:r>
+            <a:r>
+              <a:rPr sz="2400" b="0">
+                <a:solidFill>
+                  <a:srgbClr val="1F2A44"/>
+                </a:solidFill>
+                <a:latin typeface="Nunito Sans"/>
+              </a:rPr>
+              <a:t>Se parece mucho a la del reconocimiento médico. Pero mira bien el orden.</a:t>
+            </a:r>
+          </a:p>
+          <a:p>
+            <a:pPr>
+              <a:spcAft>
+                <a:spcPts val="1080"/>
+              </a:spcAft>
+            </a:pPr>
+            <a:r>
+              <a:rPr sz="2400" b="1">
+                <a:solidFill>
+                  <a:srgbClr val="E8793A"/>
+                </a:solidFill>
+                <a:latin typeface="Nunito Sans"/>
+              </a:rPr>
+              <a:t>3. </a:t>
+            </a:r>
+            <a:r>
+              <a:rPr sz="2400" b="0">
+                <a:solidFill>
+                  <a:srgbClr val="1F2A44"/>
+                </a:solidFill>
+                <a:latin typeface="Nunito Sans"/>
+              </a:rPr>
+              <a:t>Las dos premisas pueden ser verdad y ese chico ser de 2.º A, que también tiene Inglés.</a:t>
+            </a:r>
+          </a:p>
+          <a:p>
+            <a:pPr>
+              <a:spcAft>
+                <a:spcPts val="1080"/>
+              </a:spcAft>
+            </a:pPr>
+            <a:r>
+              <a:rPr sz="2400" b="1">
+                <a:solidFill>
+                  <a:srgbClr val="E8793A"/>
+                </a:solidFill>
+                <a:latin typeface="Nunito Sans"/>
+              </a:rPr>
+              <a:t>4. </a:t>
+            </a:r>
+            <a:r>
+              <a:rPr sz="2400" b="0">
+                <a:solidFill>
+                  <a:srgbClr val="1F2A44"/>
+                </a:solidFill>
+                <a:latin typeface="Nunito Sans"/>
+              </a:rPr>
+              <a:t>La conclusión no sale de las premisas: la deducción está </a:t>
+            </a:r>
+            <a:r>
+              <a:rPr sz="2400" b="1">
+                <a:solidFill>
+                  <a:srgbClr val="1F2A44"/>
+                </a:solidFill>
+                <a:latin typeface="Nunito Sans"/>
+              </a:rPr>
+              <a:t>mal hecha</a:t>
+            </a:r>
+            <a:r>
+              <a:rPr sz="2400" b="0">
+                <a:solidFill>
+                  <a:srgbClr val="1F2A44"/>
+                </a:solidFill>
+                <a:latin typeface="Nunito Sans"/>
+              </a:rPr>
+              <a:t>.</a:t>
+            </a:r>
+          </a:p>
+          <a:p>
+            <a:pPr>
+              <a:spcAft>
+                <a:spcPts val="1080"/>
+              </a:spcAft>
+            </a:pPr>
+            <a:r>
+              <a:rPr sz="2400" b="1">
+                <a:solidFill>
+                  <a:srgbClr val="E8793A"/>
+                </a:solidFill>
+                <a:latin typeface="Nunito Sans"/>
+              </a:rPr>
+              <a:t>5. </a:t>
+            </a:r>
+            <a:r>
+              <a:rPr sz="2400" b="0">
+                <a:solidFill>
+                  <a:srgbClr val="1F2A44"/>
+                </a:solidFill>
+                <a:latin typeface="Nunito Sans"/>
+              </a:rPr>
+              <a:t>Conclusión: no mires solo las palabras. Pregunta: si las premisas son verdad, ¿puede fallar la conclusión?</a:t>
+            </a:r>
+          </a:p>
+        </p:txBody>
+      </p:sp>
+    </p:spTree>
+  </p:cSld>
+  <p:clrMapOvr>
+    <a:masterClrMapping/>
+  </p:clrMapOvr>
+</p:sld>
+</file>
+
+<file path=ppt/slides/slide14.xml><?xml version="1.0" encoding="utf-8"?>
 <p:sld xmlns:a="http://schemas.openxmlformats.org/drawingml/2006/main" xmlns:p="http://schemas.openxmlformats.org/presentationml/2006/main" xmlns:r="http://schemas.openxmlformats.org/officeDocument/2006/relationships">
   <p:cSld>
     <p:bg>
@@ -4646,7 +5027,7 @@
                 </a:solidFill>
                 <a:latin typeface="Fredoka"/>
               </a:rPr>
-              <a:t>Emoción con razones o en lugar de razones</a:t>
+              <a:t>Errores típicos</a:t>
             </a:r>
           </a:p>
         </p:txBody>
@@ -4659,7 +5040,7 @@
 </p:sld>
 </file>
 
-<file path=ppt/slides/slide14.xml><?xml version="1.0" encoding="utf-8"?>
+<file path=ppt/slides/slide15.xml><?xml version="1.0" encoding="utf-8"?>
 <p:sld xmlns:a="http://schemas.openxmlformats.org/drawingml/2006/main" xmlns:p="http://schemas.openxmlformats.org/presentationml/2006/main" xmlns:r="http://schemas.openxmlformats.org/officeDocument/2006/relationships">
   <p:cSld>
     <p:bg>
@@ -4711,7 +5092,7 @@
                 </a:solidFill>
                 <a:latin typeface="Nunito Sans"/>
               </a:rPr>
-              <a:t>BLOQUE 3 · EMOCIÓN CON RAZONES O EN LUGAR DE RAZONES</a:t>
+              <a:t>BLOQUE 3 · ERRORES TÍPICOS</a:t>
             </a:r>
           </a:p>
         </p:txBody>
@@ -4750,7 +5131,7 @@
                 </a:solidFill>
                 <a:latin typeface="Fredoka"/>
               </a:rPr>
-              <a:t>¿Cuándo es falacia?</a:t>
+              <a:t>Cuidado con estas ideas</a:t>
             </a:r>
           </a:p>
         </p:txBody>
@@ -4832,7 +5213,7 @@
                 </a:solidFill>
                 <a:latin typeface="Nunito Sans"/>
               </a:rPr>
-              <a:t>Falacia</a:t>
+              <a:t>Error</a:t>
             </a:r>
           </a:p>
         </p:txBody>
@@ -4880,16 +5261,48 @@
                 </a:solidFill>
                 <a:latin typeface="Nunito Sans"/>
               </a:rPr>
-              <a:t>El miedo, la pena o la culpa </a:t>
-            </a:r>
+              <a:t>«Es una deducción, así que la conclusión es verdad»</a:t>
+            </a:r>
+          </a:p>
+          <a:p>
+            <a:pPr>
+              <a:spcAft>
+                <a:spcPts val="1170"/>
+              </a:spcAft>
+            </a:pPr>
             <a:r>
               <a:rPr sz="2600" b="1">
                 <a:solidFill>
+                  <a:srgbClr val="E8793A"/>
+                </a:solidFill>
+                <a:latin typeface="Nunito Sans"/>
+              </a:rPr>
+              <a:t>• </a:t>
+            </a:r>
+            <a:r>
+              <a:rPr sz="2600" b="0">
+                <a:solidFill>
                   <a:srgbClr val="1F2A44"/>
                 </a:solidFill>
                 <a:latin typeface="Nunito Sans"/>
               </a:rPr>
-              <a:t>sustituyen</a:t>
+              <a:t>«Si ha pasado muchas veces, pasará seguro»</a:t>
+            </a:r>
+          </a:p>
+          <a:p>
+            <a:pPr>
+              <a:spcAft>
+                <a:spcPts val="1170"/>
+              </a:spcAft>
+            </a:pPr>
+            <a:r>
+              <a:rPr sz="2600" b="1">
+                <a:solidFill>
+                  <a:srgbClr val="E8793A"/>
+                </a:solidFill>
+                <a:latin typeface="Nunito Sans"/>
+              </a:rPr>
+              <a:t>• </a:t>
             </a:r>
             <a:r>
               <a:rPr sz="2600" b="0">
@@ -4898,57 +5311,7 @@
                 </a:solidFill>
                 <a:latin typeface="Nunito Sans"/>
               </a:rPr>
-              <a:t> a las razones</a:t>
-            </a:r>
-          </a:p>
-          <a:p>
-            <a:pPr>
-              <a:spcAft>
-                <a:spcPts val="1170"/>
-              </a:spcAft>
-            </a:pPr>
-            <a:r>
-              <a:rPr sz="2600" b="1">
-                <a:solidFill>
-                  <a:srgbClr val="E8793A"/>
-                </a:solidFill>
-                <a:latin typeface="Nunito Sans"/>
-              </a:rPr>
-              <a:t>• </a:t>
-            </a:r>
-            <a:r>
-              <a:rPr sz="2600" b="0">
-                <a:solidFill>
-                  <a:srgbClr val="1F2A44"/>
-                </a:solidFill>
-                <a:latin typeface="Nunito Sans"/>
-              </a:rPr>
-              <a:t>El peligro no se demuestra</a:t>
-            </a:r>
-          </a:p>
-          <a:p>
-            <a:pPr>
-              <a:spcAft>
-                <a:spcPts val="1170"/>
-              </a:spcAft>
-            </a:pPr>
-            <a:r>
-              <a:rPr sz="2600" b="1">
-                <a:solidFill>
-                  <a:srgbClr val="E8793A"/>
-                </a:solidFill>
-                <a:latin typeface="Nunito Sans"/>
-              </a:rPr>
-              <a:t>• </a:t>
-            </a:r>
-            <a:r>
-              <a:rPr sz="2600" b="0">
-                <a:solidFill>
-                  <a:srgbClr val="1F2A44"/>
-                </a:solidFill>
-                <a:latin typeface="Nunito Sans"/>
-              </a:rPr>
-              <a:t>Te meten prisa para que no pienses</a:t>
+              <a:t>«La inducción no sirve para nada»</a:t>
             </a:r>
           </a:p>
         </p:txBody>
@@ -5030,7 +5393,7 @@
                 </a:solidFill>
                 <a:latin typeface="Nunito Sans"/>
               </a:rPr>
-              <a:t>Legítimo</a:t>
+              <a:t>Mejor así</a:t>
             </a:r>
           </a:p>
         </p:txBody>
@@ -5078,16 +5441,48 @@
                 </a:solidFill>
                 <a:latin typeface="Nunito Sans"/>
               </a:rPr>
-              <a:t>La emoción </a:t>
-            </a:r>
+              <a:t>La deducción asegura solo si está bien hecha y las premisas son verdad</a:t>
+            </a:r>
+          </a:p>
+          <a:p>
+            <a:pPr>
+              <a:spcAft>
+                <a:spcPts val="1170"/>
+              </a:spcAft>
+            </a:pPr>
             <a:r>
               <a:rPr sz="2600" b="1">
                 <a:solidFill>
+                  <a:srgbClr val="E8793A"/>
+                </a:solidFill>
+                <a:latin typeface="Nunito Sans"/>
+              </a:rPr>
+              <a:t>• </a:t>
+            </a:r>
+            <a:r>
+              <a:rPr sz="2600" b="0">
+                <a:solidFill>
                   <a:srgbClr val="1F2A44"/>
                 </a:solidFill>
                 <a:latin typeface="Nunito Sans"/>
               </a:rPr>
-              <a:t>acompaña</a:t>
+              <a:t>La inducción es muy útil: la usamos cada día</a:t>
+            </a:r>
+          </a:p>
+          <a:p>
+            <a:pPr>
+              <a:spcAft>
+                <a:spcPts val="1170"/>
+              </a:spcAft>
+            </a:pPr>
+            <a:r>
+              <a:rPr sz="2600" b="1">
+                <a:solidFill>
+                  <a:srgbClr val="E8793A"/>
+                </a:solidFill>
+                <a:latin typeface="Nunito Sans"/>
+              </a:rPr>
+              <a:t>• </a:t>
             </a:r>
             <a:r>
               <a:rPr sz="2600" b="0">
@@ -5096,391 +5491,7 @@
                 </a:solidFill>
                 <a:latin typeface="Nunito Sans"/>
               </a:rPr>
-              <a:t> a las razones</a:t>
-            </a:r>
-          </a:p>
-          <a:p>
-            <a:pPr>
-              <a:spcAft>
-                <a:spcPts val="1170"/>
-              </a:spcAft>
-            </a:pPr>
-            <a:r>
-              <a:rPr sz="2600" b="1">
-                <a:solidFill>
-                  <a:srgbClr val="E8793A"/>
-                </a:solidFill>
-                <a:latin typeface="Nunito Sans"/>
-              </a:rPr>
-              <a:t>• </a:t>
-            </a:r>
-            <a:r>
-              <a:rPr sz="2600" b="0">
-                <a:solidFill>
-                  <a:srgbClr val="1F2A44"/>
-                </a:solidFill>
-                <a:latin typeface="Nunito Sans"/>
-              </a:rPr>
-              <a:t>El peligro es real y se explica</a:t>
-            </a:r>
-          </a:p>
-          <a:p>
-            <a:pPr>
-              <a:spcAft>
-                <a:spcPts val="1170"/>
-              </a:spcAft>
-            </a:pPr>
-            <a:r>
-              <a:rPr sz="2600" b="1">
-                <a:solidFill>
-                  <a:srgbClr val="E8793A"/>
-                </a:solidFill>
-                <a:latin typeface="Nunito Sans"/>
-              </a:rPr>
-              <a:t>• </a:t>
-            </a:r>
-            <a:r>
-              <a:rPr sz="2600" b="0">
-                <a:solidFill>
-                  <a:srgbClr val="1F2A44"/>
-                </a:solidFill>
-                <a:latin typeface="Nunito Sans"/>
-              </a:rPr>
-              <a:t>Puedes comprobarlo con calma</a:t>
-            </a:r>
-          </a:p>
-        </p:txBody>
-      </p:sp>
-    </p:spTree>
-  </p:cSld>
-  <p:clrMapOvr>
-    <a:masterClrMapping/>
-  </p:clrMapOvr>
-</p:sld>
-</file>
-
-<file path=ppt/slides/slide15.xml><?xml version="1.0" encoding="utf-8"?>
-<p:sld xmlns:a="http://schemas.openxmlformats.org/drawingml/2006/main" xmlns:p="http://schemas.openxmlformats.org/presentationml/2006/main" xmlns:r="http://schemas.openxmlformats.org/officeDocument/2006/relationships">
-  <p:cSld>
-    <p:bg>
-      <p:bgPr>
-        <a:solidFill>
-          <a:srgbClr val="F6C9A8"/>
-        </a:solidFill>
-        <a:effectLst/>
-      </p:bgPr>
-    </p:bg>
-    <p:spTree>
-      <p:nvGrpSpPr>
-        <p:cNvPr id="1" name=""/>
-        <p:cNvGrpSpPr/>
-        <p:nvPr/>
-      </p:nvGrpSpPr>
-      <p:grpSpPr/>
-      <p:sp>
-        <p:nvSpPr>
-          <p:cNvPr id="2" name="TextBox 1"/>
-          <p:cNvSpPr txBox="1"/>
-          <p:nvPr/>
-        </p:nvSpPr>
-        <p:spPr>
-          <a:xfrm>
-            <a:off x="640000" y="380000"/>
-            <a:ext cx="10912000" cy="420000"/>
-          </a:xfrm>
-          <a:prstGeom prst="rect">
-            <a:avLst/>
-          </a:prstGeom>
-          <a:noFill/>
-        </p:spPr>
-        <p:txBody>
-          <a:bodyPr wrap="square">
-            <a:spAutoFit/>
-          </a:bodyPr>
-          <a:lstStyle/>
-          <a:p>
-            <a:pPr>
-              <a:spcAft>
-                <a:spcPts val="630"/>
-              </a:spcAft>
-            </a:pPr>
-            <a:r>
-              <a:rPr sz="1400" b="1">
-                <a:solidFill>
-                  <a:srgbClr val="1F2A44"/>
-                </a:solidFill>
-                <a:latin typeface="Nunito Sans"/>
-              </a:rPr>
-              <a:t>CASO TRAMPA · BLOQUE 3 · EMOCIÓN CON RAZONES O EN LUGAR DE RAZONES</a:t>
-            </a:r>
-          </a:p>
-        </p:txBody>
-      </p:sp>
-      <p:sp>
-        <p:nvSpPr>
-          <p:cNvPr id="3" name="TextBox 2"/>
-          <p:cNvSpPr txBox="1"/>
-          <p:nvPr/>
-        </p:nvSpPr>
-        <p:spPr>
-          <a:xfrm>
-            <a:off x="640000" y="760000"/>
-            <a:ext cx="10912000" cy="800000"/>
-          </a:xfrm>
-          <a:prstGeom prst="rect">
-            <a:avLst/>
-          </a:prstGeom>
-          <a:noFill/>
-        </p:spPr>
-        <p:txBody>
-          <a:bodyPr wrap="square">
-            <a:spAutoFit/>
-          </a:bodyPr>
-          <a:lstStyle/>
-          <a:p>
-            <a:pPr>
-              <a:spcAft>
-                <a:spcPts val="1710"/>
-              </a:spcAft>
-            </a:pPr>
-            <a:r>
-              <a:rPr sz="3800" b="1">
-                <a:solidFill>
-                  <a:srgbClr val="1F2A44"/>
-                </a:solidFill>
-                <a:latin typeface="Fredoka"/>
-              </a:rPr>
-              <a:t>⚠ ¿Dar pena es siempre falacia?</a:t>
-            </a:r>
-          </a:p>
-        </p:txBody>
-      </p:sp>
-      <p:sp>
-        <p:nvSpPr>
-          <p:cNvPr id="4" name="Rectangle 3"/>
-          <p:cNvSpPr/>
-          <p:nvPr/>
-        </p:nvSpPr>
-        <p:spPr>
-          <a:xfrm>
-            <a:off x="640000" y="1600000"/>
-            <a:ext cx="10912000" cy="1100000"/>
-          </a:xfrm>
-          <a:prstGeom prst="rect">
-            <a:avLst/>
-          </a:prstGeom>
-          <a:solidFill>
-            <a:srgbClr val="FBF7EF"/>
-          </a:solidFill>
-          <a:ln>
-            <a:noFill/>
-          </a:ln>
-        </p:spPr>
-        <p:style>
-          <a:lnRef idx="1">
-            <a:schemeClr val="accent1"/>
-          </a:lnRef>
-          <a:fillRef idx="3">
-            <a:schemeClr val="accent1"/>
-          </a:fillRef>
-          <a:effectRef idx="2">
-            <a:schemeClr val="accent1"/>
-          </a:effectRef>
-          <a:fontRef idx="minor">
-            <a:schemeClr val="lt1"/>
-          </a:fontRef>
-        </p:style>
-        <p:txBody>
-          <a:bodyPr rtlCol="0" anchor="ctr"/>
-          <a:lstStyle/>
-          <a:p>
-            <a:pPr algn="ctr"/>
-          </a:p>
-        </p:txBody>
-      </p:sp>
-      <p:sp>
-        <p:nvSpPr>
-          <p:cNvPr id="5" name="TextBox 4"/>
-          <p:cNvSpPr txBox="1"/>
-          <p:nvPr/>
-        </p:nvSpPr>
-        <p:spPr>
-          <a:xfrm>
-            <a:off x="840000" y="1650000"/>
-            <a:ext cx="10512000" cy="1000000"/>
-          </a:xfrm>
-          <a:prstGeom prst="rect">
-            <a:avLst/>
-          </a:prstGeom>
-          <a:noFill/>
-        </p:spPr>
-        <p:txBody>
-          <a:bodyPr wrap="square" anchor="ctr">
-            <a:spAutoFit/>
-          </a:bodyPr>
-          <a:lstStyle/>
-          <a:p>
-            <a:pPr>
-              <a:spcAft>
-                <a:spcPts val="1170"/>
-              </a:spcAft>
-            </a:pPr>
-            <a:r>
-              <a:rPr sz="2600" b="1">
-                <a:solidFill>
-                  <a:srgbClr val="1F2A44"/>
-                </a:solidFill>
-                <a:latin typeface="Nunito Sans"/>
-              </a:rPr>
-              <a:t>Cartel del instituto: «Recogemos comida para el banco de alimentos. Hay familias del barrio que no tienen suficiente para comer».</a:t>
-            </a:r>
-          </a:p>
-        </p:txBody>
-      </p:sp>
-      <p:sp>
-        <p:nvSpPr>
-          <p:cNvPr id="6" name="TextBox 5"/>
-          <p:cNvSpPr txBox="1"/>
-          <p:nvPr/>
-        </p:nvSpPr>
-        <p:spPr>
-          <a:xfrm>
-            <a:off x="640000" y="2900000"/>
-            <a:ext cx="10912000" cy="3500000"/>
-          </a:xfrm>
-          <a:prstGeom prst="rect">
-            <a:avLst/>
-          </a:prstGeom>
-          <a:noFill/>
-        </p:spPr>
-        <p:txBody>
-          <a:bodyPr wrap="square">
-            <a:spAutoFit/>
-          </a:bodyPr>
-          <a:lstStyle/>
-          <a:p>
-            <a:pPr>
-              <a:spcAft>
-                <a:spcPts val="1080"/>
-              </a:spcAft>
-            </a:pPr>
-            <a:r>
-              <a:rPr sz="2400" b="1">
-                <a:solidFill>
-                  <a:srgbClr val="E8793A"/>
-                </a:solidFill>
-                <a:latin typeface="Nunito Sans"/>
-              </a:rPr>
-              <a:t>1. </a:t>
-            </a:r>
-            <a:r>
-              <a:rPr sz="2400" b="0">
-                <a:solidFill>
-                  <a:srgbClr val="1F2A44"/>
-                </a:solidFill>
-                <a:latin typeface="Nunito Sans"/>
-              </a:rPr>
-              <a:t>Da pena. ¿Es una apelación a la pena?</a:t>
-            </a:r>
-          </a:p>
-          <a:p>
-            <a:pPr>
-              <a:spcAft>
-                <a:spcPts val="1080"/>
-              </a:spcAft>
-            </a:pPr>
-            <a:r>
-              <a:rPr sz="2400" b="1">
-                <a:solidFill>
-                  <a:srgbClr val="E8793A"/>
-                </a:solidFill>
-                <a:latin typeface="Nunito Sans"/>
-              </a:rPr>
-              <a:t>2. </a:t>
-            </a:r>
-            <a:r>
-              <a:rPr sz="2400" b="0">
-                <a:solidFill>
-                  <a:srgbClr val="1F2A44"/>
-                </a:solidFill>
-                <a:latin typeface="Nunito Sans"/>
-              </a:rPr>
-              <a:t>Sí, da pena: habla de familias que lo pasan mal.</a:t>
-            </a:r>
-          </a:p>
-          <a:p>
-            <a:pPr>
-              <a:spcAft>
-                <a:spcPts val="1080"/>
-              </a:spcAft>
-            </a:pPr>
-            <a:r>
-              <a:rPr sz="2400" b="1">
-                <a:solidFill>
-                  <a:srgbClr val="E8793A"/>
-                </a:solidFill>
-                <a:latin typeface="Nunito Sans"/>
-              </a:rPr>
-              <a:t>3. </a:t>
-            </a:r>
-            <a:r>
-              <a:rPr sz="2400" b="0">
-                <a:solidFill>
-                  <a:srgbClr val="1F2A44"/>
-                </a:solidFill>
-                <a:latin typeface="Nunito Sans"/>
-              </a:rPr>
-              <a:t>Pero ¿qué se pide? Ayudar. Y que alguien pase hambre es justo la razón para ayudar.</a:t>
-            </a:r>
-          </a:p>
-          <a:p>
-            <a:pPr>
-              <a:spcAft>
-                <a:spcPts val="1080"/>
-              </a:spcAft>
-            </a:pPr>
-            <a:r>
-              <a:rPr sz="2400" b="1">
-                <a:solidFill>
-                  <a:srgbClr val="E8793A"/>
-                </a:solidFill>
-                <a:latin typeface="Nunito Sans"/>
-              </a:rPr>
-              <a:t>4. </a:t>
-            </a:r>
-            <a:r>
-              <a:rPr sz="2400" b="0">
-                <a:solidFill>
-                  <a:srgbClr val="1F2A44"/>
-                </a:solidFill>
-                <a:latin typeface="Nunito Sans"/>
-              </a:rPr>
-              <a:t>Si quito la pena, ¿qué razón queda? Una necesidad real, que se puede comprobar.</a:t>
-            </a:r>
-          </a:p>
-          <a:p>
-            <a:pPr>
-              <a:spcAft>
-                <a:spcPts val="1080"/>
-              </a:spcAft>
-            </a:pPr>
-            <a:r>
-              <a:rPr sz="2400" b="1">
-                <a:solidFill>
-                  <a:srgbClr val="E8793A"/>
-                </a:solidFill>
-                <a:latin typeface="Nunito Sans"/>
-              </a:rPr>
-              <a:t>5. </a:t>
-            </a:r>
-            <a:r>
-              <a:rPr sz="2400" b="0">
-                <a:solidFill>
-                  <a:srgbClr val="1F2A44"/>
-                </a:solidFill>
-                <a:latin typeface="Nunito Sans"/>
-              </a:rPr>
-              <a:t>Conclusión: no es falacia. La emoción acompaña a una razón que viene a cuento.</a:t>
+              <a:t>Cuantos más casos y más variados, más probable</a:t>
             </a:r>
           </a:p>
         </p:txBody>
@@ -5736,7 +5747,7 @@
                 </a:solidFill>
                 <a:latin typeface="Nunito Sans"/>
               </a:rPr>
-              <a:t>La apelación al miedo asusta en lugar de dar razones: el peligro no se demuestra.</a:t>
+              <a:t>En una deducción bien hecha, si las premisas son verdad, la conclusión es segura.</a:t>
             </a:r>
           </a:p>
           <a:p>
@@ -5761,7 +5772,7 @@
                 </a:solidFill>
                 <a:latin typeface="Nunito Sans"/>
               </a:rPr>
-              <a:t>La apelación a la pena da pena en lugar de dar razones.</a:t>
+              <a:t>En una inducción, las premisas apoyan la conclusión, pero solo la hacen probable.</a:t>
             </a:r>
           </a:p>
           <a:p>
@@ -5786,7 +5797,7 @@
                 </a:solidFill>
                 <a:latin typeface="Nunito Sans"/>
               </a:rPr>
-              <a:t>Las emociones valen si acompañan a las razones, no si las sustituyen.</a:t>
+              <a:t>Cuantos más casos, y más variados, más fuerte es una inducción.</a:t>
             </a:r>
           </a:p>
         </p:txBody>
@@ -5890,7 +5901,7 @@
                 </a:solidFill>
                 <a:latin typeface="Fredoka"/>
               </a:rPr>
-              <a:t>Cadenas falsas de WhatsApp que meten miedo</a:t>
+              <a:t>Razonamiento deductivo e inductivo</a:t>
             </a:r>
           </a:p>
         </p:txBody>
@@ -5929,7 +5940,7 @@
                 </a:solidFill>
                 <a:latin typeface="Nunito Sans"/>
               </a:rPr>
-              <a:t>Reconocer el miedo como truco en mensajes que les llegan de verdad.</a:t>
+              <a:t>Ver otros ejemplos de conclusiones seguras y conclusiones probables.</a:t>
             </a:r>
           </a:p>
         </p:txBody>
@@ -6587,7 +6598,7 @@
                 </a:solidFill>
                 <a:latin typeface="Nunito Sans"/>
               </a:rPr>
-              <a:t>En un resumen justo, el otro diría: «sí, eso ______».  (sesión 15)</a:t>
+              <a:t>Una ______ razón pasa las tres preguntas.  (sesión 15)</a:t>
             </a:r>
           </a:p>
           <a:p>
@@ -6612,7 +6623,7 @@
                 </a:solidFill>
                 <a:latin typeface="Nunito Sans"/>
               </a:rPr>
-              <a:t>Un muñeco de paja se parece a una persona, pero se ______ de un golpe.  (sesión 15)</a:t>
+              <a:t>La segunda pregunta de una buena razón es: «¿Viene a ______?», es decir, ¿tiene que ver con la conclusión?  (sesión 15)</a:t>
             </a:r>
           </a:p>
           <a:p>
@@ -6637,7 +6648,7 @@
                 </a:solidFill>
                 <a:latin typeface="Nunito Sans"/>
               </a:rPr>
-              <a:t>Para tumbar un «todos», ______ uno.  (sesión 11)</a:t>
+              <a:t>En los experimentos de la unidad 2, el de las líneas estudió la ______; el de las descargas, la obediencia.  (sesión 11)</a:t>
             </a:r>
           </a:p>
         </p:txBody>
@@ -6789,7 +6800,7 @@
                 </a:solidFill>
                 <a:latin typeface="Nunito Sans"/>
               </a:rPr>
-              <a:t>En un resumen justo, el otro diría: «sí, eso </a:t>
+              <a:t>Una </a:t>
             </a:r>
             <a:r>
               <a:rPr sz="2600" b="1">
@@ -6798,7 +6809,7 @@
                 </a:solidFill>
                 <a:latin typeface="Nunito Sans"/>
               </a:rPr>
-              <a:t>digo</a:t>
+              <a:t>buena</a:t>
             </a:r>
             <a:r>
               <a:rPr sz="2600" b="0">
@@ -6807,7 +6818,7 @@
                 </a:solidFill>
                 <a:latin typeface="Nunito Sans"/>
               </a:rPr>
-              <a:t>».  (sesión 15)</a:t>
+              <a:t> razón pasa las tres preguntas.  (sesión 15)</a:t>
             </a:r>
           </a:p>
           <a:p>
@@ -6832,7 +6843,7 @@
                 </a:solidFill>
                 <a:latin typeface="Nunito Sans"/>
               </a:rPr>
-              <a:t>Un muñeco de paja se parece a una persona, pero se </a:t>
+              <a:t>La segunda pregunta de una buena razón es: «¿Viene a </a:t>
             </a:r>
             <a:r>
               <a:rPr sz="2600" b="1">
@@ -6841,7 +6852,7 @@
                 </a:solidFill>
                 <a:latin typeface="Nunito Sans"/>
               </a:rPr>
-              <a:t>tumba</a:t>
+              <a:t>cuento</a:t>
             </a:r>
             <a:r>
               <a:rPr sz="2600" b="0">
@@ -6850,7 +6861,7 @@
                 </a:solidFill>
                 <a:latin typeface="Nunito Sans"/>
               </a:rPr>
-              <a:t> de un golpe.  (sesión 15)</a:t>
+              <a:t>?», es decir, ¿tiene que ver con la conclusión?  (sesión 15)</a:t>
             </a:r>
           </a:p>
           <a:p>
@@ -6875,7 +6886,7 @@
                 </a:solidFill>
                 <a:latin typeface="Nunito Sans"/>
               </a:rPr>
-              <a:t>Para tumbar un «todos», </a:t>
+              <a:t>En los experimentos de la unidad 2, el de las líneas estudió la </a:t>
             </a:r>
             <a:r>
               <a:rPr sz="2600" b="1">
@@ -6884,7 +6895,7 @@
                 </a:solidFill>
                 <a:latin typeface="Nunito Sans"/>
               </a:rPr>
-              <a:t>basta</a:t>
+              <a:t>conformidad</a:t>
             </a:r>
             <a:r>
               <a:rPr sz="2600" b="0">
@@ -6893,7 +6904,7 @@
                 </a:solidFill>
                 <a:latin typeface="Nunito Sans"/>
               </a:rPr>
-              <a:t> uno.  (sesión 11)</a:t>
+              <a:t>; el de las descargas, la obediencia.  (sesión 11)</a:t>
             </a:r>
           </a:p>
         </p:txBody>
@@ -7040,7 +7051,7 @@
                 </a:solidFill>
                 <a:latin typeface="Nunito Sans"/>
               </a:rPr>
-              <a:t>«Si no reenvías este mensaje a diez contactos antes de medianoche, tu cuenta de WhatsApp se borrará.»</a:t>
+              <a:t>Un chico: «Todas las veces que he pedido pizza en ese sitio ha llegado fría. Hoy también llegará fría».</a:t>
             </a:r>
           </a:p>
         </p:txBody>
@@ -7079,7 +7090,7 @@
                 </a:solidFill>
                 <a:latin typeface="Nunito Sans"/>
               </a:rPr>
-              <a:t>¿Qué sientes al leerlo? ¿Te da alguna prueba?</a:t>
+              <a:t>¿Es seguro que hoy llegará fría? ¿O solo es probable?</a:t>
             </a:r>
           </a:p>
         </p:txBody>
@@ -7183,7 +7194,7 @@
                 </a:solidFill>
                 <a:latin typeface="Fredoka"/>
               </a:rPr>
-              <a:t>Miedo, pena y culpa en lugar de razones</a:t>
+              <a:t>Dos formas de razonar</a:t>
             </a:r>
           </a:p>
         </p:txBody>
@@ -7248,7 +7259,7 @@
                 </a:solidFill>
                 <a:latin typeface="Nunito Sans"/>
               </a:rPr>
-              <a:t>BLOQUE 1 · MIEDO, PENA Y CULPA EN LUGAR DE RAZONES</a:t>
+              <a:t>BLOQUE 1 · DOS FORMAS DE RAZONAR</a:t>
             </a:r>
           </a:p>
         </p:txBody>
@@ -7287,7 +7298,7 @@
                 </a:solidFill>
                 <a:latin typeface="Fredoka"/>
               </a:rPr>
-              <a:t>Apelación al miedo (ad metum)</a:t>
+              <a:t>Deducción</a:t>
             </a:r>
           </a:p>
         </p:txBody>
@@ -7369,7 +7380,25 @@
                 </a:solidFill>
                 <a:latin typeface="Nunito Sans"/>
               </a:rPr>
-              <a:t>Convencer asustando, en lugar de dar razones: con un peligro que no se demuestra o que no viene a cuento.</a:t>
+              <a:t>En una deducción bien hecha, si las premisas son verdad, la conclusión es </a:t>
+            </a:r>
+            <a:r>
+              <a:rPr sz="2800" b="1">
+                <a:solidFill>
+                  <a:srgbClr val="1F2A44"/>
+                </a:solidFill>
+                <a:latin typeface="Nunito Sans"/>
+              </a:rPr>
+              <a:t>segura</a:t>
+            </a:r>
+            <a:r>
+              <a:rPr sz="2800" b="1">
+                <a:solidFill>
+                  <a:srgbClr val="1F2A44"/>
+                </a:solidFill>
+                <a:latin typeface="Nunito Sans"/>
+              </a:rPr>
+              <a:t>: tiene que ser verdad.</a:t>
             </a:r>
           </a:p>
         </p:txBody>
@@ -7417,16 +7446,48 @@
                 </a:solidFill>
                 <a:latin typeface="Nunito Sans"/>
               </a:rPr>
-              <a:t>Busca que decidas </a:t>
-            </a:r>
+              <a:t>P1: Todos los alumnos de 2.º tienen Inglés</a:t>
+            </a:r>
+          </a:p>
+          <a:p>
+            <a:pPr>
+              <a:spcAft>
+                <a:spcPts val="1260"/>
+              </a:spcAft>
+            </a:pPr>
             <a:r>
               <a:rPr sz="2800" b="1">
                 <a:solidFill>
+                  <a:srgbClr val="E8793A"/>
+                </a:solidFill>
+                <a:latin typeface="Nunito Sans"/>
+              </a:rPr>
+              <a:t>• </a:t>
+            </a:r>
+            <a:r>
+              <a:rPr sz="2800" b="0">
+                <a:solidFill>
                   <a:srgbClr val="1F2A44"/>
                 </a:solidFill>
                 <a:latin typeface="Nunito Sans"/>
               </a:rPr>
-              <a:t>rápido</a:t>
+              <a:t>P2: un chico es de 2.º</a:t>
+            </a:r>
+          </a:p>
+          <a:p>
+            <a:pPr>
+              <a:spcAft>
+                <a:spcPts val="1260"/>
+              </a:spcAft>
+            </a:pPr>
+            <a:r>
+              <a:rPr sz="2800" b="1">
+                <a:solidFill>
+                  <a:srgbClr val="E8793A"/>
+                </a:solidFill>
+                <a:latin typeface="Nunito Sans"/>
+              </a:rPr>
+              <a:t>• </a:t>
             </a:r>
             <a:r>
               <a:rPr sz="2800" b="0">
@@ -7435,66 +7496,7 @@
                 </a:solidFill>
                 <a:latin typeface="Nunito Sans"/>
               </a:rPr>
-              <a:t>, sin pensar</a:t>
-            </a:r>
-          </a:p>
-          <a:p>
-            <a:pPr>
-              <a:spcAft>
-                <a:spcPts val="1260"/>
-              </a:spcAft>
-            </a:pPr>
-            <a:r>
-              <a:rPr sz="2800" b="1">
-                <a:solidFill>
-                  <a:srgbClr val="E8793A"/>
-                </a:solidFill>
-                <a:latin typeface="Nunito Sans"/>
-              </a:rPr>
-              <a:t>• </a:t>
-            </a:r>
-            <a:r>
-              <a:rPr sz="2800" b="0">
-                <a:solidFill>
-                  <a:srgbClr val="1F2A44"/>
-                </a:solidFill>
-                <a:latin typeface="Nunito Sans"/>
-              </a:rPr>
-              <a:t>Cadenas de WhatsApp, anuncios, rumores</a:t>
-            </a:r>
-          </a:p>
-          <a:p>
-            <a:pPr>
-              <a:spcAft>
-                <a:spcPts val="1260"/>
-              </a:spcAft>
-            </a:pPr>
-            <a:r>
-              <a:rPr sz="2800" b="1">
-                <a:solidFill>
-                  <a:srgbClr val="E8793A"/>
-                </a:solidFill>
-                <a:latin typeface="Nunito Sans"/>
-              </a:rPr>
-              <a:t>• </a:t>
-            </a:r>
-            <a:r>
-              <a:rPr sz="2800" b="0">
-                <a:solidFill>
-                  <a:srgbClr val="1F2A44"/>
-                </a:solidFill>
-                <a:latin typeface="Nunito Sans"/>
-              </a:rPr>
-              <a:t>Pregunta: </a:t>
-            </a:r>
-            <a:r>
-              <a:rPr sz="2800" b="1">
-                <a:solidFill>
-                  <a:srgbClr val="1F2A44"/>
-                </a:solidFill>
-                <a:latin typeface="Nunito Sans"/>
-              </a:rPr>
-              <a:t>¿ese peligro es real? ¿Qué pruebas hay?</a:t>
+              <a:t>C: Por tanto, ese chico tiene Inglés</a:t>
             </a:r>
           </a:p>
         </p:txBody>
@@ -7559,7 +7561,7 @@
                 </a:solidFill>
                 <a:latin typeface="Nunito Sans"/>
               </a:rPr>
-              <a:t>BLOQUE 1 · MIEDO, PENA Y CULPA EN LUGAR DE RAZONES</a:t>
+              <a:t>BLOQUE 1 · DOS FORMAS DE RAZONAR</a:t>
             </a:r>
           </a:p>
         </p:txBody>
@@ -7598,7 +7600,7 @@
                 </a:solidFill>
                 <a:latin typeface="Fredoka"/>
               </a:rPr>
-              <a:t>Apelación a la pena (ad misericordiam)</a:t>
+              <a:t>Inducción</a:t>
             </a:r>
           </a:p>
         </p:txBody>
@@ -7680,7 +7682,43 @@
                 </a:solidFill>
                 <a:latin typeface="Nunito Sans"/>
               </a:rPr>
-              <a:t>Convencer dando pena en lugar de dar razones sobre lo que se discute.</a:t>
+              <a:t>En una inducción, las premisas </a:t>
+            </a:r>
+            <a:r>
+              <a:rPr sz="2800" b="1">
+                <a:solidFill>
+                  <a:srgbClr val="1F2A44"/>
+                </a:solidFill>
+                <a:latin typeface="Nunito Sans"/>
+              </a:rPr>
+              <a:t>apoyan</a:t>
+            </a:r>
+            <a:r>
+              <a:rPr sz="2800" b="1">
+                <a:solidFill>
+                  <a:srgbClr val="1F2A44"/>
+                </a:solidFill>
+                <a:latin typeface="Nunito Sans"/>
+              </a:rPr>
+              <a:t> la conclusión, pero no la aseguran: es </a:t>
+            </a:r>
+            <a:r>
+              <a:rPr sz="2800" b="1">
+                <a:solidFill>
+                  <a:srgbClr val="1F2A44"/>
+                </a:solidFill>
+                <a:latin typeface="Nunito Sans"/>
+              </a:rPr>
+              <a:t>probable</a:t>
+            </a:r>
+            <a:r>
+              <a:rPr sz="2800" b="1">
+                <a:solidFill>
+                  <a:srgbClr val="1F2A44"/>
+                </a:solidFill>
+                <a:latin typeface="Nunito Sans"/>
+              </a:rPr>
+              <a:t>.</a:t>
             </a:r>
           </a:p>
         </p:txBody>
@@ -7728,16 +7766,32 @@
                 </a:solidFill>
                 <a:latin typeface="Nunito Sans"/>
               </a:rPr>
-              <a:t>También se llama apelación a la </a:t>
-            </a:r>
+              <a:t>Muchas veces parte de casos que hemos visto</a:t>
+            </a:r>
+          </a:p>
+          <a:p>
+            <a:pPr>
+              <a:spcAft>
+                <a:spcPts val="1260"/>
+              </a:spcAft>
+            </a:pPr>
             <a:r>
               <a:rPr sz="2800" b="1">
                 <a:solidFill>
+                  <a:srgbClr val="E8793A"/>
+                </a:solidFill>
+                <a:latin typeface="Nunito Sans"/>
+              </a:rPr>
+              <a:t>• </a:t>
+            </a:r>
+            <a:r>
+              <a:rPr sz="2800" b="0">
+                <a:solidFill>
                   <a:srgbClr val="1F2A44"/>
                 </a:solidFill>
                 <a:latin typeface="Nunito Sans"/>
               </a:rPr>
-              <a:t>compasión</a:t>
+              <a:t>Las diez veces que fui al dentista, tuve que esperar</a:t>
             </a:r>
           </a:p>
           <a:p>
@@ -7762,7 +7816,7 @@
                 </a:solidFill>
                 <a:latin typeface="Nunito Sans"/>
               </a:rPr>
-              <a:t>La pena puede ser real, pero no responde</a:t>
+              <a:t>Por tanto, la próxima vez también esperaré</a:t>
             </a:r>
           </a:p>
           <a:p>
@@ -7787,16 +7841,7 @@
                 </a:solidFill>
                 <a:latin typeface="Nunito Sans"/>
               </a:rPr>
-              <a:t>Pregunta: </a:t>
-            </a:r>
-            <a:r>
-              <a:rPr sz="2800" b="1">
-                <a:solidFill>
-                  <a:srgbClr val="1F2A44"/>
-                </a:solidFill>
-                <a:latin typeface="Nunito Sans"/>
-              </a:rPr>
-              <a:t>si quito la pena, ¿qué razón queda?</a:t>
+              <a:t>Puede fallar: quizá esta vez no haya nadie</a:t>
             </a:r>
           </a:p>
         </p:txBody>
@@ -7861,7 +7906,7 @@
                 </a:solidFill>
                 <a:latin typeface="Nunito Sans"/>
               </a:rPr>
-              <a:t>BLOQUE 1 · MIEDO, PENA Y CULPA EN LUGAR DE RAZONES</a:t>
+              <a:t>BLOQUE 1 · DOS FORMAS DE RAZONAR</a:t>
             </a:r>
           </a:p>
         </p:txBody>
@@ -7900,7 +7945,7 @@
                 </a:solidFill>
                 <a:latin typeface="Fredoka"/>
               </a:rPr>
-              <a:t>Cómo reconocerlas</a:t>
+              <a:t>Deducción e inducción, juntas</a:t>
             </a:r>
           </a:p>
         </p:txBody>
@@ -7941,7 +7986,7 @@
                           </a:solidFill>
                           <a:latin typeface="Fredoka"/>
                         </a:rPr>
-                        <a:t>Falacia</a:t>
+                        <a:t>Pregunta</a:t>
                       </a:r>
                     </a:p>
                   </a:txBody>
@@ -7963,7 +8008,7 @@
                           </a:solidFill>
                           <a:latin typeface="Fredoka"/>
                         </a:rPr>
-                        <a:t>Señal</a:t>
+                        <a:t>Deducción</a:t>
                       </a:r>
                     </a:p>
                   </a:txBody>
@@ -7985,7 +8030,7 @@
                           </a:solidFill>
                           <a:latin typeface="Fredoka"/>
                         </a:rPr>
-                        <a:t>Ejemplo</a:t>
+                        <a:t>Inducción</a:t>
                       </a:r>
                     </a:p>
                   </a:txBody>
@@ -8009,7 +8054,7 @@
                           </a:solidFill>
                           <a:latin typeface="Nunito Sans"/>
                         </a:rPr>
-                        <a:t>Miedo</a:t>
+                        <a:t>¿Cómo es la conclusión?</a:t>
                       </a:r>
                     </a:p>
                   </a:txBody>
@@ -8031,7 +8076,7 @@
                           </a:solidFill>
                           <a:latin typeface="Nunito Sans"/>
                         </a:rPr>
-                        <a:t>«Si no…, pasará algo terrible»</a:t>
+                        <a:t>Segura, si las premisas son verdad</a:t>
                       </a:r>
                     </a:p>
                   </a:txBody>
@@ -8053,7 +8098,7 @@
                           </a:solidFill>
                           <a:latin typeface="Nunito Sans"/>
                         </a:rPr>
-                        <a:t>«Sin esta funda, perderás todas tus fotos»</a:t>
+                        <a:t>Probable</a:t>
                       </a:r>
                     </a:p>
                   </a:txBody>
@@ -8077,7 +8122,7 @@
                           </a:solidFill>
                           <a:latin typeface="Nunito Sans"/>
                         </a:rPr>
-                        <a:t>Pena</a:t>
+                        <a:t>¿Va más allá de las premisas?</a:t>
                       </a:r>
                     </a:p>
                   </a:txBody>
@@ -8099,7 +8144,7 @@
                           </a:solidFill>
                           <a:latin typeface="Nunito Sans"/>
                         </a:rPr>
-                        <a:t>Tristeza en lugar de razones</a:t>
+                        <a:t>No: solo saca lo que ya dicen</a:t>
                       </a:r>
                     </a:p>
                   </a:txBody>
@@ -8121,7 +8166,7 @@
                           </a:solidFill>
                           <a:latin typeface="Nunito Sans"/>
                         </a:rPr>
-                        <a:t>«Apruébame, que si no me castigan»</a:t>
+                        <a:t>Sí: por eso puede fallar</a:t>
                       </a:r>
                     </a:p>
                   </a:txBody>
@@ -8145,7 +8190,7 @@
                           </a:solidFill>
                           <a:latin typeface="Nunito Sans"/>
                         </a:rPr>
-                        <a:t>Culpa</a:t>
+                        <a:t>¿Puede fallar?</a:t>
                       </a:r>
                     </a:p>
                   </a:txBody>
@@ -8167,7 +8212,7 @@
                           </a:solidFill>
                           <a:latin typeface="Nunito Sans"/>
                         </a:rPr>
-                        <a:t>«Si de verdad te importara tu familia…»</a:t>
+                        <a:t>No, si está bien hecha y las premisas son verdad</a:t>
                       </a:r>
                     </a:p>
                   </a:txBody>
@@ -8189,7 +8234,7 @@
                           </a:solidFill>
                           <a:latin typeface="Nunito Sans"/>
                         </a:rPr>
-                        <a:t>«Compártelo o eres mala persona»</a:t>
+                        <a:t>Sí, aunque las premisas sean verdad</a:t>
                       </a:r>
                     </a:p>
                   </a:txBody>
